--- a/output/Aureo_Ruffier_Presentation_Projet.pptx
+++ b/output/Aureo_Ruffier_Presentation_Projet.pptx
@@ -5163,7 +5163,7 @@
           <a:p>
             <a:fld id="{13F0BBF9-FDDA-4B23-B401-580D566EDE34}" type="datetime1">
               <a:rPr lang="en-US" smtClean="0"/>
-              <a:t>10/1/2026</a:t>
+              <a:t>10/19/2026</a:t>
             </a:fld>
             <a:endParaRPr lang="en-US"/>
           </a:p>
@@ -5331,7 +5331,7 @@
           <a:p>
             <a:fld id="{9279FFBD-AE49-41AD-83FB-FE94F5340E39}" type="datetime1">
               <a:rPr lang="en-US" smtClean="0"/>
-              <a:t>10/1/2026</a:t>
+              <a:t>10/19/2026</a:t>
             </a:fld>
             <a:endParaRPr lang="en-US"/>
           </a:p>
@@ -5509,7 +5509,7 @@
           <a:p>
             <a:fld id="{8C0E8715-E3F0-4689-8D1F-767FDF19E4B2}" type="datetime1">
               <a:rPr lang="en-US" smtClean="0"/>
-              <a:t>10/1/2026</a:t>
+              <a:t>10/19/2026</a:t>
             </a:fld>
             <a:endParaRPr lang="en-US"/>
           </a:p>
@@ -5677,7 +5677,7 @@
           <a:p>
             <a:fld id="{D68F0B54-4CA1-462C-A3CA-145342ABB252}" type="datetime1">
               <a:rPr lang="en-US" smtClean="0"/>
-              <a:t>10/1/2026</a:t>
+              <a:t>10/19/2026</a:t>
             </a:fld>
             <a:endParaRPr lang="en-US"/>
           </a:p>
@@ -5922,7 +5922,7 @@
           <a:p>
             <a:fld id="{19FC4D4C-880A-4F8B-B5C2-53B3C9C28657}" type="datetime1">
               <a:rPr lang="en-US" smtClean="0"/>
-              <a:t>10/1/2026</a:t>
+              <a:t>10/19/2026</a:t>
             </a:fld>
             <a:endParaRPr lang="en-US"/>
           </a:p>
@@ -6207,7 +6207,7 @@
           <a:p>
             <a:fld id="{C1023AE9-28DD-4232-84BB-EC01B1CFADA4}" type="datetime1">
               <a:rPr lang="en-US" smtClean="0"/>
-              <a:t>10/1/2026</a:t>
+              <a:t>10/19/2026</a:t>
             </a:fld>
             <a:endParaRPr lang="en-US"/>
           </a:p>
@@ -6626,7 +6626,7 @@
           <a:p>
             <a:fld id="{E3BD6F03-AB67-4719-A2A7-2BBD689EEC74}" type="datetime1">
               <a:rPr lang="en-US" smtClean="0"/>
-              <a:t>10/1/2026</a:t>
+              <a:t>10/19/2026</a:t>
             </a:fld>
             <a:endParaRPr lang="en-US"/>
           </a:p>
@@ -6743,7 +6743,7 @@
           <a:p>
             <a:fld id="{4FD7D015-B9A4-41F9-B951-2C0BCF7D78D1}" type="datetime1">
               <a:rPr lang="en-US" smtClean="0"/>
-              <a:t>10/1/2026</a:t>
+              <a:t>10/19/2026</a:t>
             </a:fld>
             <a:endParaRPr lang="en-US"/>
           </a:p>
@@ -6838,7 +6838,7 @@
           <a:p>
             <a:fld id="{6310009B-7227-4240-9450-4F66351B3DBE}" type="datetime1">
               <a:rPr lang="en-US" smtClean="0"/>
-              <a:t>10/1/2026</a:t>
+              <a:t>10/19/2026</a:t>
             </a:fld>
             <a:endParaRPr lang="en-US"/>
           </a:p>
@@ -7131,7 +7131,7 @@
           <a:p>
             <a:fld id="{275A1ACD-57D8-4D0A-A94D-EA57B0159C4D}" type="datetime1">
               <a:rPr lang="en-US" smtClean="0"/>
-              <a:t>10/1/2026</a:t>
+              <a:t>10/19/2026</a:t>
             </a:fld>
             <a:endParaRPr lang="en-US"/>
           </a:p>
@@ -7383,7 +7383,7 @@
           <a:p>
             <a:fld id="{7A5BC11E-83E0-47F6-B517-684087A81E6E}" type="datetime1">
               <a:rPr lang="en-US" smtClean="0"/>
-              <a:t>10/1/2026</a:t>
+              <a:t>10/19/2026</a:t>
             </a:fld>
             <a:endParaRPr lang="en-US"/>
           </a:p>
@@ -7604,7 +7604,7 @@
           <a:p>
             <a:fld id="{63AE1938-7668-4051-B501-987B32E23C0F}" type="datetime1">
               <a:rPr lang="en-US" smtClean="0"/>
-              <a:t>10/1/2026</a:t>
+              <a:t>10/19/2026</a:t>
             </a:fld>
             <a:endParaRPr lang="en-US"/>
           </a:p>
@@ -8048,41 +8048,6 @@
           </a:p>
         </p:txBody>
       </p:sp>
-      <p:sp>
-        <p:nvSpPr>
-          <p:cNvPr id="6" name="TextBox 5"/>
-          <p:cNvSpPr txBox="1"/>
-          <p:nvPr/>
-        </p:nvSpPr>
-        <p:spPr>
-          <a:xfrm>
-            <a:off x="1234440" y="5497845"/>
-            <a:ext cx="3047501" cy="707886"/>
-          </a:xfrm>
-          <a:prstGeom prst="rect">
-            <a:avLst/>
-          </a:prstGeom>
-          <a:noFill/>
-        </p:spPr>
-        <p:txBody>
-          <a:bodyPr wrap="none">
-            <a:spAutoFit/>
-          </a:bodyPr>
-          <a:lstStyle/>
-          <a:p>
-            <a:r>
-              <a:rPr lang="fr-FR" sz="2000" noProof="0" dirty="0"/>
-              <a:t>Aureo Ruffier</a:t>
-            </a:r>
-          </a:p>
-          <a:p>
-            <a:r>
-              <a:rPr lang="fr-FR" sz="2000" noProof="0" dirty="0"/>
-              <a:t>POEI – DWWM / Aout 2026</a:t>
-            </a:r>
-          </a:p>
-        </p:txBody>
-      </p:sp>
       <p:pic>
         <p:nvPicPr>
           <p:cNvPr id="8" name="Image 7">
@@ -10875,7 +10840,7 @@
         </p:nvSpPr>
         <p:spPr>
           <a:xfrm>
-            <a:off x="640080" y="1234439"/>
+            <a:off x="-663696" y="2042094"/>
             <a:ext cx="6614160" cy="3272763"/>
           </a:xfrm>
           <a:prstGeom prst="rect">
@@ -10936,6 +10901,32 @@
             <a:r>
               <a:rPr lang="pt-BR" dirty="0" err="1"/>
               <a:t>l’Entity</a:t>
+            </a:r>
+            <a:endParaRPr lang="pt-BR" dirty="0"/>
+          </a:p>
+          <a:p>
+            <a:pPr algn="ctr"/>
+            <a:r>
+              <a:rPr lang="pt-BR" dirty="0"/>
+              <a:t>Exemplo de código com as classes, os </a:t>
+            </a:r>
+            <a:r>
+              <a:rPr lang="pt-BR" dirty="0" err="1"/>
+              <a:t>ORM´s</a:t>
+            </a:r>
+            <a:r>
+              <a:rPr lang="pt-BR" dirty="0"/>
+              <a:t>, PK, FK,</a:t>
+            </a:r>
+            <a:br>
+              <a:rPr lang="pt-BR" dirty="0"/>
+            </a:br>
+            <a:br>
+              <a:rPr lang="pt-BR" dirty="0"/>
+            </a:br>
+            <a:r>
+              <a:rPr lang="pt-BR" dirty="0"/>
+              <a:t>Model: </a:t>
             </a:r>
             <a:endParaRPr lang="fr-FR" dirty="0"/>
           </a:p>
